--- a/slides/claude-gateway-governance.pptx
+++ b/slides/claude-gateway-governance.pptx
@@ -3565,7 +3565,7 @@
                 </a:solidFill>
                 <a:latin typeface="Arial"/>
               </a:rPr>
-              <a:t>The identity of the developer travels with each usage metric, so cost and activity can be attributed to a person and a team without anyone configuring anything.</a:t>
+              <a:t>The developer's identity travels with each metric as an attribute, so cost and activity attribute to a person and a team without anyone configuring anything.</a:t>
             </a:r>
           </a:p>
           <a:p>
@@ -3593,7 +3593,7 @@
                 </a:solidFill>
                 <a:latin typeface="Arial"/>
               </a:rPr>
-              <a:t>The dashboard is ready on day one. </a:t>
+              <a:t>The usage dashboard is managed for you. </a:t>
             </a:r>
             <a:r>
               <a:rPr sz="1450" b="0" i="0">
@@ -3602,7 +3602,7 @@
                 </a:solidFill>
                 <a:latin typeface="Arial"/>
               </a:rPr>
-              <a:t>It shows your top spenders, usage broken down by model, and how often tool actions are approved or rejected, all built for you in CloudWatch.</a:t>
+              <a:t>Metrics flow to CloudWatch and auto-populate the built-in Coding Agent Insights dashboard — cost and tokens by user, team, and model, plus adoption — with nothing to build. The gateway's own dashboard is then just the governance and audit companion.</a:t>
             </a:r>
           </a:p>
           <a:p>
@@ -3729,7 +3729,7 @@
                 </a:solidFill>
                 <a:latin typeface="Georgia"/>
               </a:rPr>
-              <a:t>Cost by team, last 24 hours</a:t>
+              <a:t>Coding Agent Insights — cost by team</a:t>
             </a:r>
           </a:p>
         </p:txBody>
@@ -4358,7 +4358,7 @@
                 </a:solidFill>
                 <a:latin typeface="Georgia"/>
               </a:rPr>
-              <a:t>Two layers: one for trends, one for the detail</a:t>
+              <a:t>Two dashboards: usage you get for free, governance you own</a:t>
             </a:r>
           </a:p>
         </p:txBody>
@@ -4403,7 +4403,7 @@
                 </a:solidFill>
                 <a:latin typeface="Arial"/>
               </a:rPr>
-              <a:t>Visibility is split across two layers on purpose, so that everyday reporting stays inexpensive while any deeper question can still be answered on demand.</a:t>
+              <a:t>The gateway forwards its metrics over native OTLP to CloudWatch, which splits visibility across two dashboards on purpose — one managed by AWS for usage, one shipped by the stack for governance.</a:t>
             </a:r>
           </a:p>
         </p:txBody>
@@ -4493,7 +4493,7 @@
                 </a:solidFill>
                 <a:latin typeface="Georgia"/>
               </a:rPr>
-              <a:t>Metrics for the big picture</a:t>
+              <a:t>Coding Agent Insights, managed</a:t>
             </a:r>
           </a:p>
           <a:p>
@@ -4515,7 +4515,7 @@
                 </a:solidFill>
                 <a:latin typeface="Arial"/>
               </a:rPr>
-              <a:t>A small, curated set of counters tracks cost and usage by person, by team, and by model. Because the set is deliberately compact, it stays cheap to keep.</a:t>
+              <a:t>Native OTLP metrics auto-populate CloudWatch's built-in Coding Agent Insights dashboard — cost, tokens, and adoption sliced by user, team, and model. You create nothing; it appears once metrics flow.</a:t>
             </a:r>
           </a:p>
           <a:p>
@@ -4537,7 +4537,7 @@
                 </a:solidFill>
                 <a:latin typeface="Arial"/>
               </a:rPr>
-              <a:t>These counters drive the dashboard's spending views and the cost alarms, whether an alarm watches the organization's total spend or one individual's.</a:t>
+              <a:t>The same metrics are queryable in PromQL and drive the cost alarms, whether one watches the organization's total spend or a single individual's.</a:t>
             </a:r>
           </a:p>
         </p:txBody>
@@ -4627,7 +4627,7 @@
                 </a:solidFill>
                 <a:latin typeface="Georgia"/>
               </a:rPr>
-              <a:t>Logs for the specifics</a:t>
+              <a:t>The governance dashboard, yours</a:t>
             </a:r>
           </a:p>
           <a:p>
@@ -4649,7 +4649,7 @@
                 </a:solidFill>
                 <a:latin typeface="Arial"/>
               </a:rPr>
-              <a:t>Alongside the counters, the gateway records an audit event for each tool decision, sign-in, and error, and keeps them as searchable logs rather than as separate metrics.</a:t>
+              <a:t>The stack ships a lean governance dashboard for the audit signals Coding Agent Insights does not cover — an event for each tool decision, sign-in, and error, kept as searchable logs.</a:t>
             </a:r>
           </a:p>
           <a:p>
@@ -6471,7 +6471,7 @@
                 </a:solidFill>
                 <a:latin typeface="Arial"/>
               </a:rPr>
-              <a:t>We demonstrate a tool withheld from one group, then open the dashboard of top spenders.</a:t>
+              <a:t>We demonstrate a tool withheld from one group, then open the managed Coding Agent Insights dashboard of top spenders.</a:t>
             </a:r>
           </a:p>
         </p:txBody>
@@ -7146,7 +7146,7 @@
                 </a:solidFill>
                 <a:latin typeface="Arial"/>
               </a:rPr>
-              <a:t>✓   It presents spending and activity in one dashboard.</a:t>
+              <a:t>✓   It presents usage in a managed dashboard, governance in its own.</a:t>
             </a:r>
           </a:p>
           <a:p>
